--- a/CapStone Project/docs/presentation/source/build/ClaimGuard_Capstone_Presentation.pptx
+++ b/CapStone Project/docs/presentation/source/build/ClaimGuard_Capstone_Presentation.pptx
@@ -759,7 +759,7 @@
           </a:p>
           <a:p>
             <a:r>
-              <a:t>Give two concrete successes and two failures. Fast-DetectGPT had no human false positives in this small set, but missed 7 of 15 generated passages. The official benchmark has no citation markers, so no AI-score/citation correlation is claimed. Private reports were not sent to the external detector.</a:t>
+              <a:t>Give two concrete successes and two failures. In manual runs on 7 July 2026, Semantic Scholar requests without an API key and OpenAlex requests with a configured mailto parameter repeatedly returned HTTP 429, even after waiting several minutes and changing the input file. Present this as an observed service condition, not a systematic API-availability benchmark; it can reduce abstract/full-text evidence and lead to insufficient-evidence results. Fast-DetectGPT had no human false positives in this small set, but missed 7 of 15 generated passages. The official benchmark has no citation markers, so no AI-score/citation correlation is claimed. Private reports were not sent to the external detector.</a:t>
             </a:r>
           </a:p>
         </p:txBody>
@@ -5587,7 +5587,7 @@
               </a:defRPr>
             </a:pPr>
             <a:r>
-              <a:t>•  API metadata may time out or rate-limit</a:t>
+              <a:t>•  Repeated S2/OpenAlex HTTP 429 in manual runs</a:t>
             </a:r>
           </a:p>
           <a:p>
